--- a/Papers/Show.pptx
+++ b/Papers/Show.pptx
@@ -5,15 +5,13 @@
     <p:sldMasterId id="2147483648" r:id="rId1"/>
   </p:sldMasterIdLst>
   <p:notesMasterIdLst>
-    <p:notesMasterId r:id="rId6"/>
+    <p:notesMasterId r:id="rId4"/>
   </p:notesMasterIdLst>
   <p:handoutMasterIdLst>
-    <p:handoutMasterId r:id="rId7"/>
+    <p:handoutMasterId r:id="rId5"/>
   </p:handoutMasterIdLst>
   <p:sldIdLst>
-    <p:sldId id="256" r:id="rId3"/>
-    <p:sldId id="319" r:id="rId4"/>
-    <p:sldId id="320" r:id="rId5"/>
+    <p:sldId id="320" r:id="rId3"/>
   </p:sldIdLst>
   <p:sldSz cx="12192000" cy="6858000"/>
   <p:notesSz cx="6858000" cy="9144000"/>
@@ -3445,183 +3443,18 @@
       <p:grpSpPr/>
       <p:sp>
         <p:nvSpPr>
-          <p:cNvPr id="2" name="标题 1"/>
-          <p:cNvSpPr>
-            <a:spLocks noGrp="1"/>
-          </p:cNvSpPr>
-          <p:nvPr>
-            <p:ph type="ctrTitle"/>
-          </p:nvPr>
-        </p:nvSpPr>
-        <p:spPr/>
-        <p:txBody>
-          <a:bodyPr/>
-          <a:p>
-            <a:r>
-              <a:rPr lang="zh-CN" altLang="en-US" sz="4400">
-                <a:ea typeface="宋体" charset="0"/>
-              </a:rPr>
-              <a:t>校园网规划</a:t>
-            </a:r>
-            <a:endParaRPr lang="zh-CN" altLang="en-US" sz="4400">
-              <a:ea typeface="宋体" charset="0"/>
-            </a:endParaRPr>
-          </a:p>
-        </p:txBody>
-      </p:sp>
-      <p:sp>
-        <p:nvSpPr>
-          <p:cNvPr id="3" name="副标题 2"/>
-          <p:cNvSpPr>
-            <a:spLocks noGrp="1"/>
-          </p:cNvSpPr>
-          <p:nvPr>
-            <p:ph type="subTitle" idx="1"/>
-          </p:nvPr>
-        </p:nvSpPr>
-        <p:spPr/>
-        <p:txBody>
-          <a:bodyPr/>
-          <a:p>
-            <a:r>
-              <a:rPr lang="en-US" altLang="zh-CN">
-                <a:latin typeface="黑体" panose="02010609060101010101" charset="-122"/>
-                <a:ea typeface="黑体" panose="02010609060101010101" charset="-122"/>
-                <a:cs typeface="黑体" panose="02010609060101010101" charset="-122"/>
-              </a:rPr>
-              <a:t>S202513003 </a:t>
-            </a:r>
-            <a:r>
-              <a:rPr lang="zh-CN" altLang="en-US">
-                <a:latin typeface="黑体" panose="02010609060101010101" charset="-122"/>
-                <a:ea typeface="黑体" panose="02010609060101010101" charset="-122"/>
-                <a:cs typeface="黑体" panose="02010609060101010101" charset="-122"/>
-              </a:rPr>
-              <a:t>龚柏</a:t>
-            </a:r>
-            <a:r>
-              <a:rPr lang="zh-CN" altLang="en-US">
-                <a:latin typeface="黑体" panose="02010609060101010101" charset="-122"/>
-                <a:ea typeface="黑体" panose="02010609060101010101" charset="-122"/>
-                <a:cs typeface="黑体" panose="02010609060101010101" charset="-122"/>
-              </a:rPr>
-              <a:t>荣</a:t>
-            </a:r>
-            <a:endParaRPr lang="zh-CN" altLang="en-US">
-              <a:latin typeface="黑体" panose="02010609060101010101" charset="-122"/>
-              <a:ea typeface="黑体" panose="02010609060101010101" charset="-122"/>
-              <a:cs typeface="黑体" panose="02010609060101010101" charset="-122"/>
-            </a:endParaRPr>
-          </a:p>
-        </p:txBody>
-      </p:sp>
-    </p:spTree>
-  </p:cSld>
-  <p:clrMapOvr>
-    <a:masterClrMapping/>
-  </p:clrMapOvr>
-</p:sld>
-</file>
-
-<file path=ppt/slides/slide2.xml><?xml version="1.0" encoding="utf-8"?>
-<p:sld xmlns:a="http://schemas.openxmlformats.org/drawingml/2006/main" xmlns:r="http://schemas.openxmlformats.org/officeDocument/2006/relationships" xmlns:p="http://schemas.openxmlformats.org/presentationml/2006/main">
-  <p:cSld>
-    <p:spTree>
-      <p:nvGrpSpPr>
-        <p:cNvPr id="1" name=""/>
-        <p:cNvGrpSpPr/>
-        <p:nvPr/>
-      </p:nvGrpSpPr>
-      <p:grpSpPr/>
-      <p:pic>
-        <p:nvPicPr>
-          <p:cNvPr id="2" name="图片 1"/>
-          <p:cNvPicPr>
-            <a:picLocks noChangeAspect="1"/>
-          </p:cNvPicPr>
-          <p:nvPr/>
-        </p:nvPicPr>
-        <p:blipFill>
-          <a:blip r:embed="rId1"/>
-          <a:stretch>
-            <a:fillRect/>
-          </a:stretch>
-        </p:blipFill>
+          <p:cNvPr id="3" name="内容占位符 2"/>
+          <p:cNvSpPr>
+            <a:spLocks noGrp="1"/>
+          </p:cNvSpPr>
+          <p:nvPr>
+            <p:ph idx="1"/>
+          </p:nvPr>
+        </p:nvSpPr>
         <p:spPr>
           <a:xfrm>
-            <a:off x="535940" y="209550"/>
-            <a:ext cx="10934700" cy="6648450"/>
-          </a:xfrm>
-          <a:prstGeom prst="rect">
-            <a:avLst/>
-          </a:prstGeom>
-        </p:spPr>
-      </p:pic>
-      <p:sp>
-        <p:nvSpPr>
-          <p:cNvPr id="3" name="文本框 2"/>
-          <p:cNvSpPr txBox="1"/>
-          <p:nvPr/>
-        </p:nvSpPr>
-        <p:spPr>
-          <a:xfrm>
-            <a:off x="311150" y="584200"/>
-            <a:ext cx="4064000" cy="368300"/>
-          </a:xfrm>
-          <a:prstGeom prst="rect">
-            <a:avLst/>
-          </a:prstGeom>
-          <a:noFill/>
-        </p:spPr>
-        <p:txBody>
-          <a:bodyPr wrap="square" rtlCol="0">
-            <a:spAutoFit/>
-          </a:bodyPr>
-          <a:p>
-            <a:r>
-              <a:rPr lang="zh-CN" altLang="en-US">
-                <a:ea typeface="宋体" charset="0"/>
-              </a:rPr>
-              <a:t>客户端访问服务器全流程</a:t>
-            </a:r>
-            <a:endParaRPr lang="en-US" altLang="zh-CN">
-              <a:ea typeface="宋体" charset="0"/>
-            </a:endParaRPr>
-          </a:p>
-        </p:txBody>
-      </p:sp>
-    </p:spTree>
-  </p:cSld>
-  <p:clrMapOvr>
-    <a:masterClrMapping/>
-  </p:clrMapOvr>
-</p:sld>
-</file>
-
-<file path=ppt/slides/slide3.xml><?xml version="1.0" encoding="utf-8"?>
-<p:sld xmlns:a="http://schemas.openxmlformats.org/drawingml/2006/main" xmlns:r="http://schemas.openxmlformats.org/officeDocument/2006/relationships" xmlns:p="http://schemas.openxmlformats.org/presentationml/2006/main">
-  <p:cSld>
-    <p:spTree>
-      <p:nvGrpSpPr>
-        <p:cNvPr id="1" name=""/>
-        <p:cNvGrpSpPr/>
-        <p:nvPr/>
-      </p:nvGrpSpPr>
-      <p:grpSpPr/>
-      <p:sp>
-        <p:nvSpPr>
-          <p:cNvPr id="3" name="内容占位符 2"/>
-          <p:cNvSpPr>
-            <a:spLocks noGrp="1"/>
-          </p:cNvSpPr>
-          <p:nvPr>
-            <p:ph idx="1"/>
-          </p:nvPr>
-        </p:nvSpPr>
-        <p:spPr>
-          <a:xfrm>
-            <a:off x="162560" y="259715"/>
-            <a:ext cx="12029440" cy="5917565"/>
+            <a:off x="0" y="259715"/>
+            <a:ext cx="12192000" cy="5917565"/>
           </a:xfrm>
         </p:spPr>
         <p:txBody>
@@ -3654,13 +3487,13 @@
               <a:rPr lang="en-US" altLang="zh-CN" sz="2000">
                 <a:ea typeface="宋体" charset="0"/>
               </a:rPr>
-              <a:t>1. Cisco</a:t>
+              <a:t>1. </a:t>
             </a:r>
             <a:r>
               <a:rPr lang="zh-CN" altLang="en-US" sz="2000">
                 <a:ea typeface="宋体" charset="0"/>
               </a:rPr>
-              <a:t>官网教程</a:t>
+              <a:t>论文实验地址</a:t>
             </a:r>
             <a:r>
               <a:rPr lang="en-US" altLang="zh-CN" sz="2000">
@@ -3673,11 +3506,11 @@
                 <a:ea typeface="宋体" charset="0"/>
                 <a:hlinkClick r:id="rId1" tooltip="" action="ppaction://hlinkfile"/>
               </a:rPr>
-              <a:t>https://www.netacad.com/launch</a:t>
+              <a:t>https://gitee.com/BaiRong-NUC/SceneGraphBenchmark</a:t>
             </a:r>
             <a:endParaRPr lang="en-US" altLang="zh-CN" sz="2000">
               <a:ea typeface="宋体" charset="0"/>
-              <a:hlinkClick r:id="rId1" tooltip="" action="ppaction://hlinkfile"/>
+              <a:hlinkClick r:id="rId2" action="ppaction://hlinkfile"/>
             </a:endParaRPr>
           </a:p>
           <a:p>
@@ -3693,20 +3526,50 @@
             <a:r>
               <a:rPr lang="zh-CN" altLang="en-US" sz="2000">
                 <a:ea typeface="宋体" charset="0"/>
+                <a:sym typeface="+mn-ea"/>
               </a:rPr>
-              <a:t>湖科大教书匠</a:t>
-            </a:r>
+              <a:t>知乎论文笔记</a:t>
+            </a:r>
+            <a:r>
+              <a:rPr lang="en-US" altLang="zh-CN" sz="2000">
+                <a:ea typeface="宋体" charset="0"/>
+                <a:sym typeface="+mn-ea"/>
+              </a:rPr>
+              <a:t>:</a:t>
+            </a:r>
+            <a:r>
+              <a:rPr lang="en-US" altLang="zh-CN" sz="2000">
+                <a:ea typeface="宋体" charset="0"/>
+                <a:sym typeface="+mn-ea"/>
+                <a:hlinkClick r:id="rId3" action="ppaction://hlinkfile"/>
+              </a:rPr>
+              <a:t>https://zhuanlan.zhihu.com/p/343748296</a:t>
+            </a:r>
+            <a:endParaRPr lang="en-US" altLang="zh-CN" sz="2000">
+              <a:ea typeface="宋体" charset="0"/>
+            </a:endParaRPr>
+          </a:p>
+          <a:p>
+            <a:pPr marL="0" indent="0">
+              <a:buNone/>
+            </a:pPr>
             <a:r>
               <a:rPr lang="en-US" altLang="zh-CN" sz="2000">
                 <a:ea typeface="宋体" charset="0"/>
               </a:rPr>
-              <a:t>Cisco</a:t>
+              <a:t>3. </a:t>
             </a:r>
             <a:r>
               <a:rPr lang="zh-CN" altLang="en-US" sz="2000">
                 <a:ea typeface="宋体" charset="0"/>
               </a:rPr>
-              <a:t>实验</a:t>
+              <a:t>汤凯华</a:t>
+            </a:r>
+            <a:r>
+              <a:rPr lang="zh-CN" altLang="en-US" sz="2000">
+                <a:ea typeface="宋体" charset="0"/>
+              </a:rPr>
+              <a:t>作者知乎分享</a:t>
             </a:r>
             <a:r>
               <a:rPr lang="en-US" altLang="zh-CN" sz="2000">
@@ -3717,13 +3580,12 @@
             <a:r>
               <a:rPr lang="en-US" altLang="zh-CN" sz="2000">
                 <a:ea typeface="宋体" charset="0"/>
-                <a:hlinkClick r:id="rId2" tooltip="" action="ppaction://hlinkfile"/>
+                <a:hlinkClick r:id="rId4" tooltip="" action="ppaction://hlinkfile"/>
               </a:rPr>
-              <a:t>https://www.bilibili.com/video/BV1At411f7hJ</a:t>
+              <a:t>https://zhuanlan.zhihu.com/p/109657521</a:t>
             </a:r>
             <a:endParaRPr lang="en-US" altLang="zh-CN" sz="2000">
               <a:ea typeface="宋体" charset="0"/>
-              <a:hlinkClick r:id="rId2" tooltip="" action="ppaction://hlinkfile"/>
             </a:endParaRPr>
           </a:p>
           <a:p>
@@ -3734,13 +3596,13 @@
               <a:rPr lang="en-US" altLang="zh-CN" sz="2000">
                 <a:ea typeface="宋体" charset="0"/>
               </a:rPr>
-              <a:t>3. </a:t>
+              <a:t>4. Scene Graph Generation</a:t>
             </a:r>
             <a:r>
               <a:rPr lang="zh-CN" altLang="en-US" sz="2000">
                 <a:ea typeface="宋体" charset="0"/>
               </a:rPr>
-              <a:t>网络工程设计大作业</a:t>
+              <a:t>开源框架</a:t>
             </a:r>
             <a:r>
               <a:rPr lang="en-US" altLang="zh-CN" sz="2000">
@@ -3751,13 +3613,13 @@
             <a:r>
               <a:rPr lang="en-US" altLang="zh-CN" sz="2000">
                 <a:ea typeface="宋体" charset="0"/>
-                <a:hlinkClick r:id="rId3" tooltip="" action="ppaction://hlinkfile"/>
+                <a:hlinkClick r:id="rId5" tooltip="" action="ppaction://hlinkfile"/>
               </a:rPr>
-              <a:t>https://www.bilibili.com/video/BV11S4y1h7Xo</a:t>
+              <a:t>https://github.com/KaihuaTang/Scene-Graph-Benchmark.pytorch</a:t>
             </a:r>
             <a:endParaRPr lang="en-US" altLang="zh-CN" sz="2000">
               <a:ea typeface="宋体" charset="0"/>
-              <a:hlinkClick r:id="rId3" tooltip="" action="ppaction://hlinkfile"/>
+              <a:hlinkClick r:id="rId5" tooltip="" action="ppaction://hlinkfile"/>
             </a:endParaRPr>
           </a:p>
           <a:p>
@@ -3768,25 +3630,13 @@
               <a:rPr lang="en-US" altLang="zh-CN" sz="2000">
                 <a:ea typeface="宋体" charset="0"/>
               </a:rPr>
-              <a:t>4. </a:t>
+              <a:t>5. </a:t>
             </a:r>
             <a:r>
               <a:rPr lang="zh-CN" altLang="en-US" sz="2000">
                 <a:ea typeface="宋体" charset="0"/>
               </a:rPr>
-              <a:t>润_哥网络工程</a:t>
-            </a:r>
-            <a:r>
-              <a:rPr lang="en-US" altLang="zh-CN" sz="2000">
-                <a:ea typeface="宋体" charset="0"/>
-              </a:rPr>
-              <a:t>Cisco/eNSP</a:t>
-            </a:r>
-            <a:r>
-              <a:rPr lang="zh-CN" altLang="en-US" sz="2000">
-                <a:ea typeface="宋体" charset="0"/>
-              </a:rPr>
-              <a:t>教程</a:t>
+              <a:t>文本与图像迁移论文阅读笔记</a:t>
             </a:r>
             <a:r>
               <a:rPr lang="en-US" altLang="zh-CN" sz="2000">
@@ -3797,9 +3647,9 @@
             <a:r>
               <a:rPr lang="en-US" altLang="zh-CN" sz="2000">
                 <a:ea typeface="宋体" charset="0"/>
-                <a:hlinkClick r:id="rId4" tooltip="" action="ppaction://hlinkfile"/>
+                <a:hlinkClick r:id="rId6" tooltip="" action="ppaction://hlinkfile"/>
               </a:rPr>
-              <a:t>https://space.bilibili.com/261076854</a:t>
+              <a:t>https://github.com/Gary-code/KETG-paper-reading</a:t>
             </a:r>
             <a:endParaRPr lang="en-US" altLang="zh-CN" sz="2000">
               <a:ea typeface="宋体" charset="0"/>
